--- a/curso/pptx/S19.pptx
+++ b/curso/pptx/S19.pptx
@@ -5561,7 +5561,7 @@
                 </a:solidFill>
                 <a:latin typeface="Nunito Sans"/>
               </a:rPr>
-              <a:t>Pocos casos, para cosas muy distintas entre sí</a:t>
+              <a:t>例子很少，却用来说彼此很不相同的事物</a:t>
             </a:r>
           </a:p>
           <a:p>
@@ -5586,7 +5586,7 @@
                 </a:solidFill>
                 <a:latin typeface="Nunito Sans"/>
               </a:rPr>
-              <a:t>Casos muy parecidos o elegidos a propósito</a:t>
+              <a:t>例子非常相似，或者是故意挑选的</a:t>
             </a:r>
           </a:p>
           <a:p>
@@ -5611,7 +5611,7 @@
                 </a:solidFill>
                 <a:latin typeface="Nunito Sans"/>
               </a:rPr>
-              <a:t>Dice más de lo que muestran los casos</a:t>
+              <a:t>说的比例子所显示的更多</a:t>
             </a:r>
           </a:p>
         </p:txBody>
@@ -5741,7 +5741,7 @@
                 </a:solidFill>
                 <a:latin typeface="Nunito Sans"/>
               </a:rPr>
-              <a:t>Casos suficientes para lo variadas que son las cosas</a:t>
+              <a:t>例子的数量对这些事物的差异来说是足够的</a:t>
             </a:r>
           </a:p>
           <a:p>
@@ -5766,7 +5766,7 @@
                 </a:solidFill>
                 <a:latin typeface="Nunito Sans"/>
               </a:rPr>
-              <a:t>Casos variados</a:t>
+              <a:t>例子是多种多样的</a:t>
             </a:r>
           </a:p>
           <a:p>
@@ -5791,7 +5791,7 @@
                 </a:solidFill>
                 <a:latin typeface="Nunito Sans"/>
               </a:rPr>
-              <a:t>Dice solo lo que muestran: «la mayoría», «a menudo»</a:t>
+              <a:t>只说例子所显示的：“大多数”“常常”</a:t>
             </a:r>
           </a:p>
         </p:txBody>
@@ -7585,7 +7585,7 @@
                 </a:solidFill>
                 <a:latin typeface="Nunito Sans"/>
               </a:rPr>
-              <a:t>También se llama generalización </a:t>
+              <a:t>也叫</a:t>
             </a:r>
             <a:r>
               <a:rPr sz="2800" b="1">
@@ -7594,7 +7594,16 @@
                 </a:solidFill>
                 <a:latin typeface="Nunito Sans"/>
               </a:rPr>
-              <a:t>precipitada</a:t>
+              <a:t>仓促的</a:t>
+            </a:r>
+            <a:r>
+              <a:rPr sz="2800" b="0">
+                <a:solidFill>
+                  <a:srgbClr val="1F2A44"/>
+                </a:solidFill>
+                <a:latin typeface="Nunito Sans"/>
+              </a:rPr>
+              <a:t>概括</a:t>
             </a:r>
           </a:p>
           <a:p>
@@ -7619,7 +7628,7 @@
                 </a:solidFill>
                 <a:latin typeface="Nunito Sans"/>
               </a:rPr>
-              <a:t>Falla la pregunta </a:t>
+              <a:t>不过关的是问题：</a:t>
             </a:r>
             <a:r>
               <a:rPr sz="2800" b="1">
@@ -7628,7 +7637,7 @@
                 </a:solidFill>
                 <a:latin typeface="Nunito Sans"/>
               </a:rPr>
-              <a:t>¿es suficiente?</a:t>
+              <a:t>它足够吗？</a:t>
             </a:r>
             <a:r>
               <a:rPr sz="2800" b="0">
@@ -7637,7 +7646,7 @@
                 </a:solidFill>
                 <a:latin typeface="Nunito Sans"/>
               </a:rPr>
-              <a:t> （第9课）</a:t>
+              <a:t>（第 9 课）</a:t>
             </a:r>
           </a:p>
           <a:p>
@@ -7662,7 +7671,7 @@
                 </a:solidFill>
                 <a:latin typeface="Nunito Sans"/>
               </a:rPr>
-              <a:t>Pregunta: </a:t>
+              <a:t>要问：</a:t>
             </a:r>
             <a:r>
               <a:rPr sz="2800" b="1">
@@ -7671,7 +7680,7 @@
                 </a:solidFill>
                 <a:latin typeface="Nunito Sans"/>
               </a:rPr>
-              <a:t>¿cuántos casos has mirado? ¿Son suficientes?</a:t>
+              <a:t>你看了多少个例子？够不够？</a:t>
             </a:r>
           </a:p>
         </p:txBody>
@@ -7823,7 +7832,7 @@
                 </a:solidFill>
                 <a:latin typeface="Nunito Sans"/>
               </a:rPr>
-              <a:t>Suele usar palabras como </a:t>
+              <a:t>常常用到这样的词：</a:t>
             </a:r>
             <a:r>
               <a:rPr sz="2800" b="1">
@@ -7832,7 +7841,7 @@
                 </a:solidFill>
                 <a:latin typeface="Nunito Sans"/>
               </a:rPr>
-              <a:t>todos</a:t>
+              <a:t>所有</a:t>
             </a:r>
             <a:r>
               <a:rPr sz="2800" b="0">
@@ -7841,7 +7850,7 @@
                 </a:solidFill>
                 <a:latin typeface="Nunito Sans"/>
               </a:rPr>
-              <a:t>, </a:t>
+              <a:t>、</a:t>
             </a:r>
             <a:r>
               <a:rPr sz="2800" b="1">
@@ -7850,7 +7859,7 @@
                 </a:solidFill>
                 <a:latin typeface="Nunito Sans"/>
               </a:rPr>
-              <a:t>nunca</a:t>
+              <a:t>从不</a:t>
             </a:r>
             <a:r>
               <a:rPr sz="2800" b="0">
@@ -7859,7 +7868,7 @@
                 </a:solidFill>
                 <a:latin typeface="Nunito Sans"/>
               </a:rPr>
-              <a:t>, </a:t>
+              <a:t>、</a:t>
             </a:r>
             <a:r>
               <a:rPr sz="2800" b="1">
@@ -7868,7 +7877,7 @@
                 </a:solidFill>
                 <a:latin typeface="Nunito Sans"/>
               </a:rPr>
-              <a:t>siempre</a:t>
+              <a:t>总是</a:t>
             </a:r>
             <a:r>
               <a:rPr sz="2800" b="0">
@@ -7877,7 +7886,7 @@
                 </a:solidFill>
                 <a:latin typeface="Nunito Sans"/>
               </a:rPr>
-              <a:t>, </a:t>
+              <a:t>、</a:t>
             </a:r>
             <a:r>
               <a:rPr sz="2800" b="1">
@@ -7886,7 +7895,7 @@
                 </a:solidFill>
                 <a:latin typeface="Nunito Sans"/>
               </a:rPr>
-              <a:t>ninguno</a:t>
+              <a:t>没有一个</a:t>
             </a:r>
           </a:p>
           <a:p>
@@ -7911,7 +7920,7 @@
                 </a:solidFill>
                 <a:latin typeface="Nunito Sans"/>
               </a:rPr>
-              <a:t>La prueba es un caso, dos o «uno que conozco»</a:t>
+              <a:t>证据只是一个例子、两个例子，或者“我认识的一个人”</a:t>
             </a:r>
           </a:p>
           <a:p>
@@ -7936,7 +7945,7 @@
                 </a:solidFill>
                 <a:latin typeface="Nunito Sans"/>
               </a:rPr>
-              <a:t>Muchas veces habla de un grupo entero de personas</a:t>
+              <a:t>常常说的是整整一群人</a:t>
             </a:r>
           </a:p>
           <a:p>
@@ -7961,7 +7970,7 @@
                 </a:solidFill>
                 <a:latin typeface="Nunito Sans"/>
               </a:rPr>
-              <a:t>Así nacen muchos </a:t>
+              <a:t>很多</a:t>
             </a:r>
             <a:r>
               <a:rPr sz="2800" b="1">
@@ -7970,7 +7979,7 @@
                 </a:solidFill>
                 <a:latin typeface="Nunito Sans"/>
               </a:rPr>
-              <a:t>estereotipos</a:t>
+              <a:t>刻板印象</a:t>
             </a:r>
             <a:r>
               <a:rPr sz="2800" b="0">
@@ -7979,7 +7988,7 @@
                 </a:solidFill>
                 <a:latin typeface="Nunito Sans"/>
               </a:rPr>
-              <a:t>: ideas fijas sobre un grupo</a:t>
+              <a:t>就是这样产生的：对一个群体的固定看法</a:t>
             </a:r>
           </a:p>
         </p:txBody>

--- a/curso/pptx/S19.pptx
+++ b/curso/pptx/S19.pptx
@@ -4439,7 +4439,7 @@
                 </a:solidFill>
                 <a:latin typeface="Nunito Sans"/>
               </a:rPr>
-              <a:t>陈：“一个一年级的男生昨天在走廊里推了我。一年级的人都是没礼貌的。”</a:t>
+              <a:t>一个男孩：“一个一年级的男生昨天在走廊里推了我。一年级的人都是没礼貌的。”</a:t>
             </a:r>
           </a:p>
         </p:txBody>
@@ -5057,7 +5057,7 @@
                 </a:solidFill>
                 <a:latin typeface="Nunito Sans"/>
               </a:rPr>
-              <a:t>玛亚伦尝了一勺汤，说：“这汤太咸了。”她只看了一个例子。</a:t>
+              <a:t>一个女孩尝了一勺汤，说：“这汤太咸了。”她只看了一个例子。</a:t>
             </a:r>
           </a:p>
         </p:txBody>
